--- a/decks/combined-cells/combined-cells_ch2_animal-and-plant-cells.pptx
+++ b/decks/combined-cells/combined-cells_ch2_animal-and-plant-cells.pptx
@@ -124,30 +124,30 @@
   <p:extLst>
     <p:ext uri="{521415D9-36F7-43E2-AB2F-B90AF26B5E84}">
       <p14:sectionLst xmlns:p14="http://schemas.microsoft.com/office/powerpoint/2010/main">
-        <p14:section name="Opening" id="{c4941d54-1dbb-48aa-0380-dd47dee69d4f}">
+        <p14:section name="Opening" id="{c2829ae8-8e30-1be1-6cfd-57329cd83341}">
           <p14:sldIdLst>
             <p14:sldId id="256"/>
           </p14:sldIdLst>
         </p14:section>
-        <p14:section name="Gate" id="{76f12beb-b219-1aff-0860-11435242734f}">
+        <p14:section name="Gate" id="{861ec5e9-8bf5-ced5-f010-9725a971c010}">
           <p14:sldIdLst>
             <p14:sldId id="257"/>
             <p14:sldId id="258"/>
           </p14:sldIdLst>
         </p14:section>
-        <p14:section name="Pre-teach" id="{a909acc8-28ee-c173-5505-6b782c95847f}">
+        <p14:section name="Pre-teach" id="{21eb36c1-9405-76ec-3967-c46c3695c124}">
           <p14:sldIdLst>
             <p14:sldId id="259"/>
             <p14:sldId id="260"/>
           </p14:sldIdLst>
         </p14:section>
-        <p14:section name="Read-along" id="{e7d2f7ad-999b-4c14-21bf-6ab4e1ad462f}">
+        <p14:section name="Read-along" id="{3929385c-5679-fc58-1d3c-1e167d26ff67}">
           <p14:sldIdLst>
             <p14:sldId id="261"/>
             <p14:sldId id="262"/>
           </p14:sldIdLst>
         </p14:section>
-        <p14:section name="Teach" id="{428c6165-4943-ef73-7056-3b51237c03d1}">
+        <p14:section name="Teach" id="{edd28882-8b4f-921a-f4a8-867f60d1b052}">
           <p14:sldIdLst>
             <p14:sldId id="263"/>
             <p14:sldId id="264"/>
@@ -155,19 +155,19 @@
             <p14:sldId id="266"/>
           </p14:sldIdLst>
         </p14:section>
-        <p14:section name="Routes" id="{508b515f-e88e-2f8d-f7cf-ffdcd3b441a1}">
+        <p14:section name="Routes" id="{79bd2d59-efea-5318-f1e6-2b31f9e9672e}">
           <p14:sldIdLst>
             <p14:sldId id="267"/>
             <p14:sldId id="268"/>
             <p14:sldId id="269"/>
           </p14:sldIdLst>
         </p14:section>
-        <p14:section name="Close" id="{cbaebff2-fd4a-2ebc-5555-f27dc7f0b18e}">
+        <p14:section name="Close" id="{0bfd5c31-afc5-23be-ca91-acd9361fdd49}">
           <p14:sldIdLst>
             <p14:sldId id="270"/>
           </p14:sldIdLst>
         </p14:section>
-        <p14:section name="Answers" id="{2771b27c-c92e-1f40-ca9c-3f0fe8f00b3e}">
+        <p14:section name="Answers" id="{f309cf8a-2f51-f7d2-5b68-8e0c9b0f9805}">
           <p14:sldIdLst>
             <p14:sldId id="271"/>
             <p14:sldId id="272"/>
@@ -1321,7 +1321,7 @@
             <a:r>
               <a:rPr lang="en-US" dirty="0"/>
               <a:t>Answers — task 2: Plant or animal?. Reveal the answer; pupils mark their own work in a different colour, then read the "why" together. Same destination for every lane, so one answer serves the whole class.
-Answer: B   cell wall
+Answer: D   cell wall
 Why: The cell wall is the one structure found in every plant cell and never in an animal cell.
 Ask a Support pupil to explain one step, and a Stretch pupil to share their extension.</a:t>
             </a:r>
@@ -1504,7 +1504,7 @@
               <a:rPr lang="en-US" dirty="0"/>
               <a:t>Do now — retrieval. Silent, no notes, no help: recall comes before any support. Give about four minutes.
 1. Which part of a cell controls its activities and contains the DNA?  →  A   nucleus
-2. Which of these structures is in a plant cell but not in an animal cell?  →  B   chloroplast
+2. Which of these structures is in a plant cell but not in an animal cell?  →  D   chloroplast
 3. The cell wall of a plant cell is made of ___.  →  cellulose
 Circulate: who gets 3/3 (Stretch route), 2/3 (Core), 0–1 (Support)? Use this to route pupils later in the lesson.</a:t>
             </a:r>
@@ -1596,7 +1596,7 @@
               <a:rPr lang="en-US" dirty="0"/>
               <a:t>Answers — pupils mark their own in a different colour, then hands up for 3/3, 2/3, 1/3.
 1. A   nucleus. The nucleus controls the cell and holds the genetic material, DNA, in chromosomes.
-2. B   chloroplast. Chloroplasts, the cell wall and the permanent vacuole are the three plant-only structures. Ribosomes, a nucleus and a cell membrane are in both.
+2. D   chloroplast. Chloroplasts, the cell wall and the permanent vacuole are the three plant-only structures. Ribosomes, a nucleus and a cell membrane are in both.
 3. cellulose. Plant cell walls are made of cellulose, a tough carbohydrate that gives the cell strength and shape.
 Say the route each score points to: 3/3 Stretch, 2/3 Core, 0–1 Support. Pupils may choose to move up.</a:t>
             </a:r>
@@ -8399,7 +8399,7 @@
                 <a:ea typeface="Calibri" pitchFamily="34" charset="-122"/>
                 <a:cs typeface="Calibri" pitchFamily="34" charset="-120"/>
               </a:rPr>
-              <a:t>cell wall      </a:t>
+              <a:t>cell membrane      </a:t>
             </a:r>
             <a:pPr algn="ctr" indent="0" marL="0">
               <a:buNone/>
@@ -8455,7 +8455,7 @@
                 <a:ea typeface="Calibri" pitchFamily="34" charset="-122"/>
                 <a:cs typeface="Calibri" pitchFamily="34" charset="-120"/>
               </a:rPr>
-              <a:t>cell membrane</a:t>
+              <a:t>cell wall</a:t>
             </a:r>
             <a:endParaRPr lang="en-US" sz="2000" dirty="0"/>
           </a:p>
@@ -10605,7 +10605,7 @@
                 <a:ea typeface="Cambria" pitchFamily="34" charset="-122"/>
                 <a:cs typeface="Cambria" pitchFamily="34" charset="-120"/>
               </a:rPr>
-              <a:t>B   cell wall</a:t>
+              <a:t>D   cell wall</a:t>
             </a:r>
             <a:endParaRPr lang="en-US" sz="1800" dirty="0"/>
           </a:p>
@@ -11783,7 +11783,7 @@
                 <a:ea typeface="Calibri" pitchFamily="34" charset="-122"/>
                 <a:cs typeface="Calibri" pitchFamily="34" charset="-120"/>
               </a:rPr>
-              <a:t>cytoplasm</a:t>
+              <a:t>cell membrane</a:t>
             </a:r>
             <a:endParaRPr lang="en-US" sz="2400" dirty="0"/>
           </a:p>
@@ -11820,7 +11820,7 @@
                 <a:ea typeface="Calibri" pitchFamily="34" charset="-122"/>
                 <a:cs typeface="Calibri" pitchFamily="34" charset="-120"/>
               </a:rPr>
-              <a:t>cell membrane</a:t>
+              <a:t>mitochondria</a:t>
             </a:r>
             <a:endParaRPr lang="en-US" sz="2400" dirty="0"/>
           </a:p>
@@ -11857,7 +11857,7 @@
                 <a:ea typeface="Calibri" pitchFamily="34" charset="-122"/>
                 <a:cs typeface="Calibri" pitchFamily="34" charset="-120"/>
               </a:rPr>
-              <a:t>mitochondria</a:t>
+              <a:t>cytoplasm</a:t>
             </a:r>
             <a:endParaRPr lang="en-US" sz="2400" dirty="0"/>
           </a:p>
@@ -12061,7 +12061,7 @@
                 <a:ea typeface="Calibri" pitchFamily="34" charset="-122"/>
                 <a:cs typeface="Calibri" pitchFamily="34" charset="-120"/>
               </a:rPr>
-              <a:t>ribosome</a:t>
+              <a:t>nucleus</a:t>
             </a:r>
             <a:endParaRPr lang="en-US" sz="2400" dirty="0"/>
           </a:p>
@@ -12098,7 +12098,7 @@
                 <a:ea typeface="Calibri" pitchFamily="34" charset="-122"/>
                 <a:cs typeface="Calibri" pitchFamily="34" charset="-120"/>
               </a:rPr>
-              <a:t>chloroplast</a:t>
+              <a:t>cell membrane</a:t>
             </a:r>
             <a:endParaRPr lang="en-US" sz="2400" dirty="0"/>
           </a:p>
@@ -12135,7 +12135,7 @@
                 <a:ea typeface="Calibri" pitchFamily="34" charset="-122"/>
                 <a:cs typeface="Calibri" pitchFamily="34" charset="-120"/>
               </a:rPr>
-              <a:t>nucleus</a:t>
+              <a:t>ribosome</a:t>
             </a:r>
             <a:endParaRPr lang="en-US" sz="2400" dirty="0"/>
           </a:p>
@@ -12172,7 +12172,7 @@
                 <a:ea typeface="Calibri" pitchFamily="34" charset="-122"/>
                 <a:cs typeface="Calibri" pitchFamily="34" charset="-120"/>
               </a:rPr>
-              <a:t>cell membrane</a:t>
+              <a:t>chloroplast</a:t>
             </a:r>
             <a:endParaRPr lang="en-US" sz="2400" dirty="0"/>
           </a:p>
@@ -13021,7 +13021,7 @@
                 <a:ea typeface="Calibri" pitchFamily="34" charset="-122"/>
                 <a:cs typeface="Calibri" pitchFamily="34" charset="-120"/>
               </a:rPr>
-              <a:t>B   chloroplast</a:t>
+              <a:t>D   chloroplast</a:t>
             </a:r>
             <a:endParaRPr lang="en-US" sz="2200" dirty="0"/>
           </a:p>

--- a/decks/combined-cells/combined-cells_ch2_animal-and-plant-cells.pptx
+++ b/decks/combined-cells/combined-cells_ch2_animal-and-plant-cells.pptx
@@ -124,30 +124,30 @@
   <p:extLst>
     <p:ext uri="{521415D9-36F7-43E2-AB2F-B90AF26B5E84}">
       <p14:sectionLst xmlns:p14="http://schemas.microsoft.com/office/powerpoint/2010/main">
-        <p14:section name="Opening" id="{c2829ae8-8e30-1be1-6cfd-57329cd83341}">
+        <p14:section name="Opening" id="{b639c8d7-36d8-6519-77d3-0ac55f2dd577}">
           <p14:sldIdLst>
             <p14:sldId id="256"/>
           </p14:sldIdLst>
         </p14:section>
-        <p14:section name="Gate" id="{861ec5e9-8bf5-ced5-f010-9725a971c010}">
+        <p14:section name="Gate" id="{57d38109-4859-04ed-e32e-0bdb4dee636b}">
           <p14:sldIdLst>
             <p14:sldId id="257"/>
             <p14:sldId id="258"/>
           </p14:sldIdLst>
         </p14:section>
-        <p14:section name="Pre-teach" id="{21eb36c1-9405-76ec-3967-c46c3695c124}">
+        <p14:section name="Pre-teach" id="{8c5b5f78-acd6-76a1-dbb3-c09abb1410ed}">
           <p14:sldIdLst>
             <p14:sldId id="259"/>
             <p14:sldId id="260"/>
           </p14:sldIdLst>
         </p14:section>
-        <p14:section name="Read-along" id="{3929385c-5679-fc58-1d3c-1e167d26ff67}">
+        <p14:section name="Read-along" id="{66a4ce8c-f732-319b-b431-25477f9f6549}">
           <p14:sldIdLst>
             <p14:sldId id="261"/>
             <p14:sldId id="262"/>
           </p14:sldIdLst>
         </p14:section>
-        <p14:section name="Teach" id="{edd28882-8b4f-921a-f4a8-867f60d1b052}">
+        <p14:section name="Teach" id="{bac24616-8226-d941-e9d9-ad805b57b1e0}">
           <p14:sldIdLst>
             <p14:sldId id="263"/>
             <p14:sldId id="264"/>
@@ -155,19 +155,19 @@
             <p14:sldId id="266"/>
           </p14:sldIdLst>
         </p14:section>
-        <p14:section name="Routes" id="{79bd2d59-efea-5318-f1e6-2b31f9e9672e}">
+        <p14:section name="Routes" id="{1a4bd5ad-4b93-89bb-91e3-aa0cf4eb485d}">
           <p14:sldIdLst>
             <p14:sldId id="267"/>
             <p14:sldId id="268"/>
             <p14:sldId id="269"/>
           </p14:sldIdLst>
         </p14:section>
-        <p14:section name="Close" id="{0bfd5c31-afc5-23be-ca91-acd9361fdd49}">
+        <p14:section name="Close" id="{bfdcb3f8-ffe8-e3eb-fc0b-986b98280a2b}">
           <p14:sldIdLst>
             <p14:sldId id="270"/>
           </p14:sldIdLst>
         </p14:section>
-        <p14:section name="Answers" id="{f309cf8a-2f51-f7d2-5b68-8e0c9b0f9805}">
+        <p14:section name="Answers" id="{65317f4d-e00f-5b79-8e75-162e2e0e5996}">
           <p14:sldIdLst>
             <p14:sldId id="271"/>
             <p14:sldId id="272"/>
